--- a/ai-case-library/research/ventures/grid-9block-deck-bw.pptx
+++ b/ai-case-library/research/ventures/grid-9block-deck-bw.pptx
@@ -2224,7 +2224,7 @@
             <a:off x="548640" y="2148840"/>
             <a:ext cx="3544824" cy="1828800"/>
           </a:xfrm>
-          <a:prstGeom prst="roundRect">
+          <a:prstGeom prst="rect">
             <a:avLst/>
           </a:prstGeom>
           <a:solidFill>
@@ -2366,7 +2366,7 @@
             <a:off x="4322064" y="2148840"/>
             <a:ext cx="3544824" cy="1828800"/>
           </a:xfrm>
-          <a:prstGeom prst="roundRect">
+          <a:prstGeom prst="rect">
             <a:avLst/>
           </a:prstGeom>
           <a:solidFill>
@@ -2508,7 +2508,7 @@
             <a:off x="8095488" y="2148840"/>
             <a:ext cx="3544824" cy="1828800"/>
           </a:xfrm>
-          <a:prstGeom prst="roundRect">
+          <a:prstGeom prst="rect">
             <a:avLst/>
           </a:prstGeom>
           <a:solidFill>
@@ -3381,7 +3381,7 @@
             <a:off x="548640" y="2148840"/>
             <a:ext cx="5431536" cy="1828800"/>
           </a:xfrm>
-          <a:prstGeom prst="roundRect">
+          <a:prstGeom prst="rect">
             <a:avLst/>
           </a:prstGeom>
           <a:solidFill>
@@ -3484,7 +3484,7 @@
             <a:off x="6208776" y="2148840"/>
             <a:ext cx="5431536" cy="1828800"/>
           </a:xfrm>
-          <a:prstGeom prst="roundRect">
+          <a:prstGeom prst="rect">
             <a:avLst/>
           </a:prstGeom>
           <a:solidFill>
@@ -3940,7 +3940,7 @@
             <a:off x="548640" y="2148840"/>
             <a:ext cx="3544824" cy="2011680"/>
           </a:xfrm>
-          <a:prstGeom prst="roundRect">
+          <a:prstGeom prst="rect">
             <a:avLst/>
           </a:prstGeom>
           <a:solidFill>
@@ -4082,7 +4082,7 @@
             <a:off x="4322064" y="2148840"/>
             <a:ext cx="3544824" cy="2011680"/>
           </a:xfrm>
-          <a:prstGeom prst="roundRect">
+          <a:prstGeom prst="rect">
             <a:avLst/>
           </a:prstGeom>
           <a:solidFill>
@@ -4224,7 +4224,7 @@
             <a:off x="8095488" y="2148840"/>
             <a:ext cx="3544824" cy="2011680"/>
           </a:xfrm>
-          <a:prstGeom prst="roundRect">
+          <a:prstGeom prst="rect">
             <a:avLst/>
           </a:prstGeom>
           <a:solidFill>
@@ -4716,7 +4716,7 @@
             <a:off x="548640" y="2148840"/>
             <a:ext cx="2601468" cy="1874520"/>
           </a:xfrm>
-          <a:prstGeom prst="roundRect">
+          <a:prstGeom prst="rect">
             <a:avLst/>
           </a:prstGeom>
           <a:solidFill>
@@ -4858,7 +4858,7 @@
             <a:off x="3378708" y="2148840"/>
             <a:ext cx="2601468" cy="1874520"/>
           </a:xfrm>
-          <a:prstGeom prst="roundRect">
+          <a:prstGeom prst="rect">
             <a:avLst/>
           </a:prstGeom>
           <a:solidFill>
@@ -5000,7 +5000,7 @@
             <a:off x="6208776" y="2148840"/>
             <a:ext cx="2601468" cy="1874520"/>
           </a:xfrm>
-          <a:prstGeom prst="roundRect">
+          <a:prstGeom prst="rect">
             <a:avLst/>
           </a:prstGeom>
           <a:solidFill>
@@ -5142,7 +5142,7 @@
             <a:off x="9038844" y="2148840"/>
             <a:ext cx="2601468" cy="1874520"/>
           </a:xfrm>
-          <a:prstGeom prst="roundRect">
+          <a:prstGeom prst="rect">
             <a:avLst/>
           </a:prstGeom>
           <a:solidFill>
@@ -5598,7 +5598,7 @@
             <a:off x="548640" y="2148840"/>
             <a:ext cx="3544824" cy="1874520"/>
           </a:xfrm>
-          <a:prstGeom prst="roundRect">
+          <a:prstGeom prst="rect">
             <a:avLst/>
           </a:prstGeom>
           <a:solidFill>
@@ -5740,7 +5740,7 @@
             <a:off x="4322064" y="2148840"/>
             <a:ext cx="3544824" cy="1874520"/>
           </a:xfrm>
-          <a:prstGeom prst="roundRect">
+          <a:prstGeom prst="rect">
             <a:avLst/>
           </a:prstGeom>
           <a:solidFill>
@@ -5882,7 +5882,7 @@
             <a:off x="8095488" y="2148840"/>
             <a:ext cx="3544824" cy="1874520"/>
           </a:xfrm>
-          <a:prstGeom prst="roundRect">
+          <a:prstGeom prst="rect">
             <a:avLst/>
           </a:prstGeom>
           <a:solidFill>
@@ -6338,7 +6338,7 @@
             <a:off x="548640" y="2148840"/>
             <a:ext cx="5431536" cy="1691640"/>
           </a:xfrm>
-          <a:prstGeom prst="roundRect">
+          <a:prstGeom prst="rect">
             <a:avLst/>
           </a:prstGeom>
           <a:solidFill>
@@ -6480,7 +6480,7 @@
             <a:off x="6208776" y="2148840"/>
             <a:ext cx="5431536" cy="1691640"/>
           </a:xfrm>
-          <a:prstGeom prst="roundRect">
+          <a:prstGeom prst="rect">
             <a:avLst/>
           </a:prstGeom>
           <a:solidFill>
@@ -6975,7 +6975,7 @@
             <a:off x="548640" y="2194560"/>
             <a:ext cx="3544824" cy="1920240"/>
           </a:xfrm>
-          <a:prstGeom prst="roundRect">
+          <a:prstGeom prst="rect">
             <a:avLst/>
           </a:prstGeom>
           <a:solidFill>
@@ -7078,7 +7078,7 @@
             <a:off x="4322064" y="2194560"/>
             <a:ext cx="3544824" cy="1920240"/>
           </a:xfrm>
-          <a:prstGeom prst="roundRect">
+          <a:prstGeom prst="rect">
             <a:avLst/>
           </a:prstGeom>
           <a:solidFill>
@@ -7181,7 +7181,7 @@
             <a:off x="8095488" y="2194560"/>
             <a:ext cx="3544824" cy="1920240"/>
           </a:xfrm>
-          <a:prstGeom prst="roundRect">
+          <a:prstGeom prst="rect">
             <a:avLst/>
           </a:prstGeom>
           <a:solidFill>
@@ -7637,7 +7637,7 @@
             <a:off x="548640" y="2148840"/>
             <a:ext cx="3544824" cy="1874520"/>
           </a:xfrm>
-          <a:prstGeom prst="roundRect">
+          <a:prstGeom prst="rect">
             <a:avLst/>
           </a:prstGeom>
           <a:solidFill>
@@ -7779,7 +7779,7 @@
             <a:off x="4322064" y="2148840"/>
             <a:ext cx="3544824" cy="1874520"/>
           </a:xfrm>
-          <a:prstGeom prst="roundRect">
+          <a:prstGeom prst="rect">
             <a:avLst/>
           </a:prstGeom>
           <a:solidFill>
@@ -7921,7 +7921,7 @@
             <a:off x="8095488" y="2148840"/>
             <a:ext cx="3544824" cy="1874520"/>
           </a:xfrm>
-          <a:prstGeom prst="roundRect">
+          <a:prstGeom prst="rect">
             <a:avLst/>
           </a:prstGeom>
           <a:solidFill>
@@ -8416,7 +8416,7 @@
             <a:off x="548640" y="2148840"/>
             <a:ext cx="2601468" cy="1097280"/>
           </a:xfrm>
-          <a:prstGeom prst="roundRect">
+          <a:prstGeom prst="rect">
             <a:avLst/>
           </a:prstGeom>
           <a:solidFill>
@@ -8519,7 +8519,7 @@
             <a:off x="3378708" y="2148840"/>
             <a:ext cx="2601468" cy="1097280"/>
           </a:xfrm>
-          <a:prstGeom prst="roundRect">
+          <a:prstGeom prst="rect">
             <a:avLst/>
           </a:prstGeom>
           <a:solidFill>
@@ -8622,7 +8622,7 @@
             <a:off x="6208776" y="2148840"/>
             <a:ext cx="2601468" cy="1097280"/>
           </a:xfrm>
-          <a:prstGeom prst="roundRect">
+          <a:prstGeom prst="rect">
             <a:avLst/>
           </a:prstGeom>
           <a:solidFill>
@@ -8725,7 +8725,7 @@
             <a:off x="9038844" y="2148840"/>
             <a:ext cx="2601468" cy="1097280"/>
           </a:xfrm>
-          <a:prstGeom prst="roundRect">
+          <a:prstGeom prst="rect">
             <a:avLst/>
           </a:prstGeom>
           <a:solidFill>
@@ -8828,7 +8828,7 @@
             <a:off x="548640" y="3429000"/>
             <a:ext cx="3544824" cy="1554480"/>
           </a:xfrm>
-          <a:prstGeom prst="roundRect">
+          <a:prstGeom prst="rect">
             <a:avLst/>
           </a:prstGeom>
           <a:solidFill>
@@ -8996,7 +8996,7 @@
             <a:off x="4322064" y="3429000"/>
             <a:ext cx="3544824" cy="1554480"/>
           </a:xfrm>
-          <a:prstGeom prst="roundRect">
+          <a:prstGeom prst="rect">
             <a:avLst/>
           </a:prstGeom>
           <a:solidFill>
@@ -9164,7 +9164,7 @@
             <a:off x="8095488" y="3429000"/>
             <a:ext cx="3544824" cy="1554480"/>
           </a:xfrm>
-          <a:prstGeom prst="roundRect">
+          <a:prstGeom prst="rect">
             <a:avLst/>
           </a:prstGeom>
           <a:solidFill>

--- a/ai-case-library/research/ventures/grid-9block-deck-bw.pptx
+++ b/ai-case-library/research/ventures/grid-9block-deck-bw.pptx
@@ -1128,7 +1128,7 @@
           <a:p>
             <a:r>
               <a:rPr lang="en-US" dirty="0"/>
-              <a:t>Финмодель: при ×1,2 — убыток (критерий остановки), ×1,5 — маржа 24%, ×2 — 58%. Доля инжиниринга ≈3% CAPEX — MISO. Цена фирмы 0,8–1,2× выручки — допущение.</a:t>
+              <a:t>Финмодель: при ×1,2 — убыток (критерий остановки), ×1,5 — маржа 24%, ×2 — 58%. Доля инжиниринга ≈3% CAPEX — MISO. Цена фирмы 0,8–1,2× выручки — допущение. Сверка с паспортом роллапа: SPI/Kantata 2026 — маржа сектора 9,8 → 9,9% при росте доли ИИ-проектов с 19 до 27%; базовая ставка при покупке малых сервисных фирм — минус 6 п.п. (Yale SOM). Поэтому 24% — цель, а порог ×1,5 после пилотов — единственная её проверка.</a:t>
             </a:r>
             <a:endParaRPr lang="en-US" dirty="0"/>
           </a:p>
@@ -1216,7 +1216,7 @@
           <a:p>
             <a:r>
               <a:rPr lang="en-US" dirty="0"/>
-              <a:t>450 млн $ — оценка (3% от 15 млрд $, доля инжиниринга по MISO); IEA Energy and AI 2025/2026; 445 тыс. $ — цена по американским ставкам, направление рынка, не наш мультипликатор.</a:t>
+              <a:t>450 млн $ — оценка (3% от 15 млрд $, доля инжиниринга по MISO); IEA Energy and AI 2025/2026; 445 тыс. $ — цена по американским ставкам за группу на 4000 человек. Паспорт роллапа: малые фирмы стоят 5,4–7,5× EBITDA, двузначный мультипликатор начинается с выручки 75–100 млн $; покупатель-фонд платит 10,75×, стратег — 7,34×.</a:t>
             </a:r>
             <a:endParaRPr lang="en-US" dirty="0"/>
           </a:p>
@@ -1304,7 +1304,7 @@
           <a:p>
             <a:r>
               <a:rPr lang="en-US" dirty="0"/>
-              <a:t>Первый, кто соберёт группу с ИИ внутри, станет консолидатором. Не называть выручку года 5 как «будет».</a:t>
+              <a:t>Консолидаторы уже есть (Trilon — 19 покупок, Qualus — выход по 14,9×); наше отличие — Залив и Индия, куда они не идут, и ИИ как инструмент инженера (модель NV5: бренды и автономия фирм сохраняются). Группа на 20–40 млн $ уходит по 6–8×; двузначный мультипликатор — с выручки 75–100 млн $. Не называть выручку года 5 как «будет».</a:t>
             </a:r>
             <a:endParaRPr lang="en-US" dirty="0"/>
           </a:p>
@@ -3138,6 +3138,27 @@
             </a:r>
             <a:endParaRPr lang="en-US" sz="1150" dirty="0"/>
           </a:p>
+          <a:p>
+            <a:pPr marL="342900" indent="-342900">
+              <a:spcAft>
+                <a:spcPts val="600"/>
+              </a:spcAft>
+              <a:buSzPct val="100000"/>
+              <a:buChar char="•"/>
+            </a:pPr>
+            <a:r>
+              <a:rPr lang="en-US" sz="1150" dirty="0">
+                <a:solidFill>
+                  <a:srgbClr val="000000"/>
+                </a:solidFill>
+                <a:latin typeface="Arial" pitchFamily="34" charset="0"/>
+                <a:ea typeface="Arial" pitchFamily="34" charset="-122"/>
+                <a:cs typeface="Arial" pitchFamily="34" charset="-120"/>
+              </a:rPr>
+              <a:t>Сверка с паспортом роллапа (engineering-rollup-passport.md, 02.09.2026): маржа сектора 9,8 → 9,9% — SPI/Kantata 2026; малые фирмы 5,4–7,5× EBITDA — ROG Partners; фонды 10,75× против стратегов 7,34× — ACEC / Morrissey Goodale 2018–2023; двузначный мультипликатор с выручки 75–100 млн $; Qualus → Clearlake ~14,9× (25.03.2026); E Source → CF Power (09.2025); Littlejohn + GDS (05.03.2026); отток 47%/75% — EY; NV5 — 49 покупок, 1,7 млрд $ (08.2025).</a:t>
+            </a:r>
+            <a:endParaRPr lang="en-US" sz="1150" dirty="0"/>
+          </a:p>
         </p:txBody>
       </p:sp>
     </p:spTree>
@@ -6605,7 +6626,7 @@
                 <a:ea typeface="Arial" pitchFamily="34" charset="-122"/>
                 <a:cs typeface="Arial" pitchFamily="34" charset="-120"/>
               </a:rPr>
-              <a:t>выручки в год · те же 40 инженеров · маржа 24% после оплаты ИИ-команды</a:t>
+              <a:t>выручки в год · те же 40 инженеров · маржа 24% — цель модели, не факт: по сектору ИИ пока дал +0,1 п.п.</a:t>
             </a:r>
             <a:endParaRPr lang="en-US" sz="1200" dirty="0"/>
           </a:p>
@@ -7309,7 +7330,7 @@
                 <a:ea typeface="Arial" pitchFamily="34" charset="-122"/>
                 <a:cs typeface="Arial" pitchFamily="34" charset="-120"/>
               </a:rPr>
-              <a:t>Конкуренты: инженерный софт с ИИ-помощниками (Bentley), платформы данных о подключении (Enverus, купивший Pearl Street), стартапы ИИ-инжиниринга для дата-центров (Marengo, Vela — YC 2026; ThinkLabs — 28 млн $) и собственные ИИ-программы гигантов (Black &amp; Veatch). В подключении к сети с покупкой фирм — пусто.</a:t>
+              <a:t>Конкуренты: ИИ-софт (Bentley), данные о подключении (Enverus → Pearl Street), ИИ-стартапы для дата-центров (Marengo, Vela — YC 2026; ThinkLabs — 28 млн $) и консолидаторы, которые уже покупают фирмы по подключению: E Source → CF Power, Littlejohn + GDS, Qualus (продан по 14,9×). Никто из них не идёт в Залив и Индию.</a:t>
             </a:r>
             <a:endParaRPr lang="en-US" sz="1300" dirty="0"/>
           </a:p>
@@ -7390,7 +7411,7 @@
                 <a:ea typeface="Arial" pitchFamily="34" charset="-122"/>
                 <a:cs typeface="Arial" pitchFamily="34" charset="-120"/>
               </a:rPr>
-              <a:t>Собираем группу по 70 тысяч $ за инженера — стратеги покупают такие группы по 445.</a:t>
+              <a:t>Покупаем инженера за 70 тысяч $. Крупных покупают по 445 — разрыв реален, но платят его за масштаб, не за ИИ.</a:t>
             </a:r>
             <a:endParaRPr lang="en-US" sz="1500" dirty="0"/>
           </a:p>
@@ -8130,7 +8151,7 @@
                 <a:ea typeface="Arial" pitchFamily="34" charset="-122"/>
                 <a:cs typeface="Arial" pitchFamily="34" charset="-120"/>
               </a:rPr>
-              <a:t>Ожидаемый результат: группа из пяти инженерных компаний с одним ИИ; к пятому году — 500 инженеров (рост с 200 — на выручку группы и долг под неё) и продажа стратегу, который уже платит за инженеров миллиарды: WSP, Stantec, Cyient.</a:t>
+              <a:t>Ожидаемый результат: группа из пяти инженерных компаний с одним ИИ; к пятому году — 500 инженеров (рост с 200 — на выручку группы и долг под неё) и продажа. Покупатель — фонды, которые собирают такие группы (Trilon, Verdantas, E Source, Qualus → Clearlake): они платят больше стратегов, 10,8× против 7,3× прибыли.</a:t>
             </a:r>
             <a:endParaRPr lang="en-US" sz="1350" dirty="0"/>
           </a:p>
@@ -8844,7 +8865,7 @@
       </p:sp>
       <p:pic>
         <p:nvPicPr>
-          <p:cNvPr id="20" name="Image 0" descr="/tmp/claude-0/-home-user/5ac64fc3-708b-5ba2-8575-a96a48f05f03/scratchpad/okean/bw/penkov.png">    </p:cNvPr>
+          <p:cNvPr id="20" name="Image 0" descr="_team/bw/penkov.png">    </p:cNvPr>
           <p:cNvPicPr>
             <a:picLocks noChangeAspect="1"/>
           </p:cNvPicPr>
@@ -9012,7 +9033,7 @@
       </p:sp>
       <p:pic>
         <p:nvPicPr>
-          <p:cNvPr id="25" name="Image 1" descr="/tmp/claude-0/-home-user/5ac64fc3-708b-5ba2-8575-a96a48f05f03/scratchpad/okean/bw/moroshin.png">    </p:cNvPr>
+          <p:cNvPr id="25" name="Image 1" descr="_team/bw/moroshin.png">    </p:cNvPr>
           <p:cNvPicPr>
             <a:picLocks noChangeAspect="1"/>
           </p:cNvPicPr>
@@ -9180,7 +9201,7 @@
       </p:sp>
       <p:pic>
         <p:nvPicPr>
-          <p:cNvPr id="30" name="Image 2" descr="/tmp/claude-0/-home-user/5ac64fc3-708b-5ba2-8575-a96a48f05f03/scratchpad/okean/bw/kovalev.png">    </p:cNvPr>
+          <p:cNvPr id="30" name="Image 2" descr="_team/bw/kovalev.png">    </p:cNvPr>
           <p:cNvPicPr>
             <a:picLocks noChangeAspect="1"/>
           </p:cNvPicPr>

--- a/ai-case-library/research/ventures/grid-9block-deck-bw.pptx
+++ b/ai-case-library/research/ventures/grid-9block-deck-bw.pptx
@@ -1128,7 +1128,7 @@
           <a:p>
             <a:r>
               <a:rPr lang="en-US" dirty="0"/>
-              <a:t>Финмодель: при ×1,2 — убыток (критерий остановки), ×1,5 — маржа 24%, ×2 — 58%. Доля инжиниринга ≈3% CAPEX — MISO. Цена фирмы 0,8–1,2× выручки — допущение. Сверка с паспортом роллапа: SPI/Kantata 2026 — маржа сектора 9,8 → 9,9% при росте доли ИИ-проектов с 19 до 27%; базовая ставка при покупке малых сервисных фирм — минус 6 п.п. (Yale SOM). Поэтому 24% — цель, а порог ×1,5 после пилотов — единственная её проверка.</a:t>
+              <a:t>Финмодель: при ×1,2 — убыток (критерий остановки), ×1,5 — маржа 24%, ×2 — 58%. Доля инжиниринга ≈3% CAPEX — MISO. Цена фирмы 0,8–1,2× выручки — допущение. Про «сектор дал +0,1 п.п.» (SPI/Kantata 2026): это замер того, кому достаётся выигрыш, а не того, что умеет инструмент. В услугах экономия уходит клиенту через цену и тендер, поэтому маржа сектора плоская даже при растущей выработке. Плюс замер запаздывающий: он смотрит на внедрения прошлых лет. Мы поэтому меряем часы на проект у себя на пилотах, а не ждём отраслевой статистики. Сверка с паспортом роллапа: SPI/Kantata 2026 — маржа сектора 9,8 → 9,9% при росте доли ИИ-проектов с 19 до 27%; базовая ставка при покупке малых сервисных фирм — минус 6 п.п. (Yale SOM). Поэтому 24% — цель, а порог ×1,5 после пилотов — единственная её проверка.</a:t>
             </a:r>
             <a:endParaRPr lang="en-US" dirty="0"/>
           </a:p>
@@ -6626,7 +6626,7 @@
                 <a:ea typeface="Arial" pitchFamily="34" charset="-122"/>
                 <a:cs typeface="Arial" pitchFamily="34" charset="-120"/>
               </a:rPr>
-              <a:t>выручки в год · те же 40 инженеров · маржа 24% — цель модели, не факт: по сектору ИИ пока дал +0,1 п.п.</a:t>
+              <a:t>выручки в год · те же 40 инженеров · маржа 24% — цель, которую меряем часами на проект, а не отчётностью сектора</a:t>
             </a:r>
             <a:endParaRPr lang="en-US" sz="1200" dirty="0"/>
           </a:p>

--- a/ai-case-library/research/ventures/grid-9block-deck-bw.pptx
+++ b/ai-case-library/research/ventures/grid-9block-deck-bw.pptx
@@ -1128,7 +1128,7 @@
           <a:p>
             <a:r>
               <a:rPr lang="en-US" dirty="0"/>
-              <a:t>Финмодель: при ×1,2 — убыток (критерий остановки), ×1,5 — маржа 24%, ×2 — 58%. Доля инжиниринга ≈3% CAPEX — MISO. Цена фирмы 0,8–1,2× выручки — допущение. Про «сектор дал +0,1 п.п.» (SPI/Kantata 2026): это замер того, кому достаётся выигрыш, а не того, что умеет инструмент. В услугах экономия уходит клиенту через цену и тендер, поэтому маржа сектора плоская даже при растущей выработке. Плюс замер запаздывающий: он смотрит на внедрения прошлых лет. Мы поэтому меряем часы на проект у себя на пилотах, а не ждём отраслевой статистики. Сверка с паспортом роллапа: SPI/Kantata 2026 — маржа сектора 9,8 → 9,9% при росте доли ИИ-проектов с 19 до 27%; базовая ставка при покупке малых сервисных фирм — минус 6 п.п. (Yale SOM). Поэтому 24% — цель, а порог ×1,5 после пилотов — единственная её проверка.</a:t>
+              <a:t>Финмодель: при ×1,2 — убыток (критерий остановки), ×1,5 — маржа 24%, ×2 — 58%. Доля инжиниринга ≈3% CAPEX — MISO. Цена фирмы 0,8–1,2× выручки — допущение. Про плоскую маржу сектора (SPI/Kantata 2026): в том же отчёте маржа проекта выросла с 35,9% до 37,7%, а утилизация упала до 66,4% — исторический минимум. Фирмы стали делать проекты дешевле, но не продали освободившиеся часы. То есть выигрыш на поставке есть, а в EBITDA он не доходит из-за спроса. Плюс замер запаздывающий. Поэтому меряем часы на типовой пакет у себя на пилотах, а не ждём отраслевой статистики. Сверка с паспортом роллапа: SPI/Kantata 2026 — маржа сектора 9,8 → 9,9% при росте доли ИИ-проектов с 19 до 27%; базовая ставка при покупке малых сервисных фирм — минус 6 п.п. (Yale SOM). Поэтому 24% — цель, а порог ×1,5 после пилотов — единственная её проверка.</a:t>
             </a:r>
             <a:endParaRPr lang="en-US" dirty="0"/>
           </a:p>

--- a/ai-case-library/research/ventures/grid-9block-deck-bw.pptx
+++ b/ai-case-library/research/ventures/grid-9block-deck-bw.pptx
@@ -6112,7 +6112,7 @@
                 <a:ea typeface="Arial" pitchFamily="34" charset="-122"/>
                 <a:cs typeface="Arial" pitchFamily="34" charset="-120"/>
               </a:rPr>
-              <a:t>Первые рынки — Персидский залив и Индия: там строят больше всего, инженеров не хватает так же (Саудовская Аравия законом требует 30% местных инженеров), стоят они в несколько раз дешевле, чем в США, и туда пускают команду из России. США и Европа — позже и через партнёров.</a:t>
+              <a:t>Первые рынки — Персидский залив и Индия. В Заливе строят больше всего и не хватает именно проектировщиков с допуском сетевых компаний; Саудовская Аравия при этом законом требует 30% местных инженеров. В Индии инженеры не в дефиците, зато в несколько раз дешевле, чем в США, и туда пускают команду из России. США и Европа — позже и через партнёров.</a:t>
             </a:r>
             <a:endParaRPr lang="en-US" sz="1350" dirty="0"/>
           </a:p>
